--- a/teoria/Modulo_2_Ancestria_global.pptx
+++ b/teoria/Modulo_2_Ancestria_global.pptx
@@ -13,9 +13,10 @@
     <p:sldId id="261" r:id="rId7"/>
     <p:sldId id="262" r:id="rId8"/>
     <p:sldId id="263" r:id="rId9"/>
+    <p:sldId id="264" r:id="rId10"/>
   </p:sldIdLst>
   <p:notesMasterIdLst>
-    <p:notesMasterId r:id="rId10"/>
+    <p:notesMasterId r:id="rId11"/>
   </p:notesMasterIdLst>
   <p:sldSz cx="12192000" cy="6858000"/>
   <p:notesSz cx="6858000" cy="12192000"/>
@@ -114,7 +115,7 @@
   <p:extLst>
     <p:ext uri="{521415D9-36F7-43E2-AB2F-B90AF26B5E84}">
       <p14:sectionLst xmlns:p14="http://schemas.microsoft.com/office/powerpoint/2010/main">
-        <p14:section name="Modulo 2" id="{e74586ba-dcd3-8bf5-6e42-2969f39364ec}">
+        <p14:section name="Modulo 2" id="{5515ad39-24a7-5b6d-a92c-9df5d0a87921}">
           <p14:sldIdLst>
             <p14:sldId id="256"/>
             <p14:sldId id="257"/>
@@ -124,6 +125,7 @@
             <p14:sldId id="261"/>
             <p14:sldId id="262"/>
             <p14:sldId id="263"/>
+            <p14:sldId id="264"/>
           </p14:sldIdLst>
         </p14:section>
       </p14:sectionLst>
@@ -1188,6 +1190,94 @@
 </p:notes>
 </file>
 
+<file path=ppt/notesSlides/notesSlide9.xml><?xml version="1.0" encoding="utf-8"?>
+<p:notes xmlns:a="http://schemas.openxmlformats.org/drawingml/2006/main" xmlns:r="http://schemas.openxmlformats.org/officeDocument/2006/relationships" xmlns:p="http://schemas.openxmlformats.org/presentationml/2006/main">
+  <p:cSld>
+    <p:spTree>
+      <p:nvGrpSpPr>
+        <p:cNvPr id="1" name=""/>
+        <p:cNvGrpSpPr/>
+        <p:nvPr/>
+      </p:nvGrpSpPr>
+      <p:grpSpPr>
+        <a:xfrm>
+          <a:off x="0" y="0"/>
+          <a:ext cx="0" cy="0"/>
+          <a:chOff x="0" y="0"/>
+          <a:chExt cx="0" cy="0"/>
+        </a:xfrm>
+      </p:grpSpPr>
+      <p:sp>
+        <p:nvSpPr>
+          <p:cNvPr id="2" name="Slide Image Placeholder 1"/>
+          <p:cNvSpPr>
+            <a:spLocks noGrp="1" noRot="1" noChangeAspect="1"/>
+          </p:cNvSpPr>
+          <p:nvPr>
+            <p:ph type="sldImg"/>
+          </p:nvPr>
+        </p:nvSpPr>
+        <p:spPr/>
+      </p:sp>
+      <p:sp>
+        <p:nvSpPr>
+          <p:cNvPr id="3" name="Notes Placeholder 2"/>
+          <p:cNvSpPr>
+            <a:spLocks noGrp="1"/>
+          </p:cNvSpPr>
+          <p:nvPr>
+            <p:ph type="body" idx="1"/>
+          </p:nvPr>
+        </p:nvSpPr>
+        <p:spPr/>
+        <p:txBody>
+          <a:bodyPr/>
+          <a:lstStyle/>
+          <a:p>
+            <a:r>
+              <a:rPr lang="en-US" dirty="0"/>
+              <a:t>Cerrar agradeciendo y recordando la fecha de la sesión práctica.</a:t>
+            </a:r>
+            <a:endParaRPr lang="en-US" dirty="0"/>
+          </a:p>
+        </p:txBody>
+      </p:sp>
+      <p:sp>
+        <p:nvSpPr>
+          <p:cNvPr id="4" name="Slide Number Placeholder 3"/>
+          <p:cNvSpPr>
+            <a:spLocks noGrp="1"/>
+          </p:cNvSpPr>
+          <p:nvPr>
+            <p:ph type="sldNum" sz="quarter" idx="10"/>
+          </p:nvPr>
+        </p:nvSpPr>
+        <p:spPr/>
+        <p:txBody>
+          <a:bodyPr/>
+          <a:lstStyle/>
+          <a:p>
+            <a:fld id="{F7021451-1387-4CA6-816F-3879F97B5CBC}" type="slidenum">
+              <a:rPr lang="en-US"/>
+              <a:t>9</a:t>
+            </a:fld>
+            <a:endParaRPr lang="en-US"/>
+          </a:p>
+        </p:txBody>
+      </p:sp>
+    </p:spTree>
+    <p:extLst>
+      <p:ext uri="{BB962C8B-B14F-4D97-AF65-F5344CB8AC3E}">
+        <p14:creationId xmlns:p14="http://schemas.microsoft.com/office/powerpoint/2010/main" val="1024086991"/>
+      </p:ext>
+    </p:extLst>
+  </p:cSld>
+  <p:clrMapOvr>
+    <a:masterClrMapping/>
+  </p:clrMapOvr>
+</p:notes>
+</file>
+
 <file path=ppt/slideLayouts/slideLayout1.xml><?xml version="1.0" encoding="utf-8"?>
 <p:sldLayout xmlns:a="http://schemas.openxmlformats.org/drawingml/2006/main" xmlns:r="http://schemas.openxmlformats.org/officeDocument/2006/relationships" xmlns:p="http://schemas.openxmlformats.org/presentationml/2006/main" preserve="1">
   <p:cSld name="DEFAULT">
@@ -1224,7 +1314,7 @@
     <p:bg>
       <p:bgPr>
         <a:solidFill>
-          <a:schemeClr val="tx2"/>
+          <a:schemeClr val="bg1"/>
         </a:solidFill>
       </p:bgPr>
     </p:bg>
@@ -1268,7 +1358,7 @@
               <a:buNone/>
               <a:defRPr lang="en-US" sz="3800" b="1" dirty="0">
                 <a:solidFill>
-                  <a:schemeClr val="bg1"/>
+                  <a:schemeClr val="accent1"/>
                 </a:solidFill>
               </a:defRPr>
             </a:lvl1pPr>
@@ -1280,7 +1370,7 @@
             <a:r>
               <a:rPr lang="en-US" sz="3800" b="1" dirty="0">
                 <a:solidFill>
-                  <a:schemeClr val="bg1"/>
+                  <a:schemeClr val="accent1"/>
                 </a:solidFill>
               </a:rPr>
               <a:t> </a:t>
@@ -1315,7 +1405,7 @@
               <a:buNone/>
               <a:defRPr lang="en-US" sz="1700" dirty="0">
                 <a:solidFill>
-                  <a:srgbClr val="FFCC83"/>
+                  <a:srgbClr val="8A6A1E"/>
                 </a:solidFill>
               </a:defRPr>
             </a:lvl1pPr>
@@ -1327,7 +1417,7 @@
             <a:r>
               <a:rPr lang="en-US" sz="1700" dirty="0">
                 <a:solidFill>
-                  <a:srgbClr val="FFCC83"/>
+                  <a:srgbClr val="8A6A1E"/>
                 </a:solidFill>
               </a:rPr>
               <a:t> </a:t>
@@ -2035,7 +2125,7 @@
             <a:r>
               <a:rPr lang="en-US" sz="3800" b="1" dirty="0">
                 <a:solidFill>
-                  <a:schemeClr val="bg1"/>
+                  <a:schemeClr val="accent1"/>
                 </a:solidFill>
               </a:rPr>
               <a:t>Módulo 2. Ancestría global</a:t>
@@ -2073,7 +2163,7 @@
             <a:r>
               <a:rPr lang="en-US" sz="1700" dirty="0">
                 <a:solidFill>
-                  <a:srgbClr val="FFCC83"/>
+                  <a:srgbClr val="8A6A1E"/>
                 </a:solidFill>
               </a:rPr>
               <a:t>Antes de la sesión del sábado 21 de noviembre</a:t>
@@ -2087,7 +2177,7 @@
             <a:r>
               <a:rPr lang="en-US" sz="1700" dirty="0">
                 <a:solidFill>
-                  <a:srgbClr val="FFCC83"/>
+                  <a:srgbClr val="8A6A1E"/>
                 </a:solidFill>
               </a:rPr>
               <a:t>PCA, métodos de clustering, ADMIXTURE e interpretación de los componentes</a:t>
@@ -2123,7 +2213,7 @@
             <a:r>
               <a:rPr lang="en-US" sz="1300" dirty="0">
                 <a:solidFill>
-                  <a:srgbClr val="C9D0F0"/>
+                  <a:srgbClr val="6E7899"/>
                 </a:solidFill>
               </a:rPr>
               <a:t>Curso de ancestría genética · Dra. Yina Tatiana Zambrano</a:t>
@@ -2131,37 +2221,10 @@
             <a:endParaRPr lang="en-US" sz="1300" dirty="0"/>
           </a:p>
         </p:txBody>
-      </p:sp>
-      <p:sp>
-        <p:nvSpPr>
-          <p:cNvPr id="6" name="placa-logo"/>
-          <p:cNvSpPr/>
-          <p:nvPr/>
-        </p:nvSpPr>
-        <p:spPr>
-          <a:xfrm>
-            <a:off x="9601200" y="5806440"/>
-            <a:ext cx="1965960" cy="841248"/>
-          </a:xfrm>
-          <a:prstGeom prst="roundRect">
-            <a:avLst>
-              <a:gd name="adj" fmla="val 8696"/>
-            </a:avLst>
-          </a:prstGeom>
-          <a:solidFill>
-            <a:schemeClr val="bg1"/>
-          </a:solidFill>
-          <a:ln w="12700">
-            <a:solidFill>
-              <a:schemeClr val="bg1"/>
-            </a:solidFill>
-            <a:prstDash val="solid"/>
-          </a:ln>
-        </p:spPr>
       </p:sp>
       <p:pic>
         <p:nvPicPr>
-          <p:cNvPr id="7" name="logo-acgh" descr="/tmp/claude-0/-home-claude/e238050a-ce3c-58bd-bb86-9554df59862c/scratchpad/marca/logo_acgh_hd.png">    </p:cNvPr>
+          <p:cNvPr id="6" name="logo-acgh" descr="/tmp/claude-0/-home-claude/e238050a-ce3c-58bd-bb86-9554df59862c/scratchpad/marca/logo_acgh_hd.png">    </p:cNvPr>
           <p:cNvPicPr>
             <a:picLocks noChangeAspect="1"/>
           </p:cNvPicPr>
@@ -2175,8 +2238,8 @@
         </p:blipFill>
         <p:spPr>
           <a:xfrm>
-            <a:off x="9784080" y="5925312"/>
-            <a:ext cx="1600200" cy="603504"/>
+            <a:off x="9464040" y="457200"/>
+            <a:ext cx="2002536" cy="749808"/>
           </a:xfrm>
           <a:prstGeom prst="rect">
             <a:avLst/>
@@ -4697,18 +4760,215 @@
       </p:sp>
       <p:sp>
         <p:nvSpPr>
-          <p:cNvPr id="6" name="caja-lecturas"/>
+          <p:cNvPr id="7" name="Text 0"/>
           <p:cNvSpPr/>
-          <p:nvPr/>
-        </p:nvSpPr>
-        <p:spPr>
-          <a:xfrm>
-            <a:off x="914400" y="4206240"/>
-            <a:ext cx="10424160" cy="1783080"/>
+          <p:nvPr>
+            <p:ph idx="101" type="body" hasCustomPrompt="1"/>
+          </p:nvPr>
+        </p:nvSpPr>
+        <p:spPr>
+          <a:xfrm>
+            <a:off x="914400" y="1508760"/>
+            <a:ext cx="10424160" cy="4572000"/>
+          </a:xfrm>
+          <a:prstGeom prst="rect">
+            <a:avLst/>
+          </a:prstGeom>
+          <a:noFill/>
+          <a:ln/>
+        </p:spPr>
+        <p:txBody>
+          <a:bodyPr wrap="square" rtlCol="0" anchor="t"/>
+          <a:lstStyle/>
+          <a:p>
+            <a:pPr algn="l" indent="0" marL="0">
+              <a:buNone/>
+            </a:pPr>
+            <a:endParaRPr lang="en-US" sz="1700" dirty="0"/>
+          </a:p>
+        </p:txBody>
+      </p:sp>
+      <p:sp>
+        <p:nvSpPr>
+          <p:cNvPr id="25" name="Slide Number Placeholder 0"/>
+          <p:cNvSpPr>
+            <a:spLocks noGrp="1"/>
+          </p:cNvSpPr>
+          <p:nvPr>
+            <p:ph type="sldNum" sz="quarter" idx="4294967295"/>
+          </p:nvPr>
+        </p:nvSpPr>
+        <p:spPr>
+          <a:xfrm>
+            <a:off x="11475720" y="256032"/>
+            <a:ext cx="800000" cy="300000"/>
+          </a:xfrm>
+          <a:prstGeom prst="rect">
+            <a:avLst/>
+          </a:prstGeom>
+          <a:extLst>
+            <a:ext uri="{C572A759-6A51-4108-AA02-DFA0A04FC94B}">
+              <ma14:wrappingTextBoxFlag xmlns:ma14="http://schemas.microsoft.com/office/mac/drawingml/2011/main" val="0"/>
+            </a:ext>
+          </a:extLst>
+        </p:spPr>
+        <p:txBody>
+          <a:bodyPr/>
+          <a:lstStyle>
+            <a:lvl1pPr>
+              <a:defRPr sz="1100">
+                <a:solidFill>
+                  <a:srgbClr val="B9C0D8"/>
+                </a:solidFill>
+              </a:defRPr>
+            </a:lvl1pPr>
+          </a:lstStyle>
+          <a:p>
+            <a:pPr algn="l"/>
+            <a:fld id="{F7021451-1387-4CA6-816F-3879F97B5CBC}" type="slidenum">
+              <a:rPr b="0" lang="en-US"/>
+              <a:t>8</a:t>
+            </a:fld>
+            <a:endParaRPr lang="en-US"/>
+          </a:p>
+        </p:txBody>
+      </p:sp>
+    </p:spTree>
+  </p:cSld>
+  <p:clrMapOvr>
+    <a:masterClrMapping/>
+  </p:clrMapOvr>
+</p:sld>
+</file>
+
+<file path=ppt/slides/slide9.xml><?xml version="1.0" encoding="utf-8"?>
+<p:sld xmlns:a="http://schemas.openxmlformats.org/drawingml/2006/main" xmlns:r="http://schemas.openxmlformats.org/officeDocument/2006/relationships" xmlns:p="http://schemas.openxmlformats.org/presentationml/2006/main">
+  <p:cSld name="Slide 9">
+    <p:spTree>
+      <p:nvGrpSpPr>
+        <p:cNvPr id="1" name=""/>
+        <p:cNvGrpSpPr/>
+        <p:nvPr/>
+      </p:nvGrpSpPr>
+      <p:grpSpPr>
+        <a:xfrm>
+          <a:off x="0" y="0"/>
+          <a:ext cx="0" cy="0"/>
+          <a:chOff x="0" y="0"/>
+          <a:chExt cx="0" cy="0"/>
+        </a:xfrm>
+      </p:grpSpPr>
+      <p:sp>
+        <p:nvSpPr>
+          <p:cNvPr id="2" name="barra-cierre"/>
+          <p:cNvSpPr/>
+          <p:nvPr/>
+        </p:nvSpPr>
+        <p:spPr>
+          <a:xfrm>
+            <a:off x="566928" y="1325880"/>
+            <a:ext cx="82296" cy="1005840"/>
+          </a:xfrm>
+          <a:prstGeom prst="rect">
+            <a:avLst/>
+          </a:prstGeom>
+          <a:solidFill>
+            <a:schemeClr val="accent2"/>
+          </a:solidFill>
+          <a:ln w="12700">
+            <a:solidFill>
+              <a:schemeClr val="accent2"/>
+            </a:solidFill>
+            <a:prstDash val="solid"/>
+          </a:ln>
+        </p:spPr>
+      </p:sp>
+      <p:sp>
+        <p:nvSpPr>
+          <p:cNvPr id="3" name="Text 1"/>
+          <p:cNvSpPr txBox="1"/>
+          <p:nvPr/>
+        </p:nvSpPr>
+        <p:spPr>
+          <a:xfrm>
+            <a:off x="914400" y="1325880"/>
+            <a:ext cx="9509760" cy="1005840"/>
+          </a:xfrm>
+          <a:prstGeom prst="rect">
+            <a:avLst/>
+          </a:prstGeom>
+          <a:noFill/>
+          <a:ln/>
+        </p:spPr>
+        <p:txBody>
+          <a:bodyPr wrap="square" lIns="0" tIns="0" rIns="0" bIns="0" rtlCol="0" anchor="ctr"/>
+          <a:lstStyle/>
+          <a:p>
+            <a:pPr indent="0" marL="0">
+              <a:buNone/>
+            </a:pPr>
+            <a:r>
+              <a:rPr lang="en-US" sz="4000" b="1" dirty="0">
+                <a:solidFill>
+                  <a:schemeClr val="accent1"/>
+                </a:solidFill>
+              </a:rPr>
+              <a:t>Gracias</a:t>
+            </a:r>
+            <a:endParaRPr lang="en-US" sz="4000" dirty="0"/>
+          </a:p>
+        </p:txBody>
+      </p:sp>
+      <p:sp>
+        <p:nvSpPr>
+          <p:cNvPr id="4" name="Text 2"/>
+          <p:cNvSpPr txBox="1"/>
+          <p:nvPr/>
+        </p:nvSpPr>
+        <p:spPr>
+          <a:xfrm>
+            <a:off x="914400" y="2395728"/>
+            <a:ext cx="9509760" cy="457200"/>
+          </a:xfrm>
+          <a:prstGeom prst="rect">
+            <a:avLst/>
+          </a:prstGeom>
+          <a:noFill/>
+          <a:ln/>
+        </p:spPr>
+        <p:txBody>
+          <a:bodyPr wrap="square" lIns="0" tIns="0" rIns="0" bIns="0" rtlCol="0" anchor="ctr"/>
+          <a:lstStyle/>
+          <a:p>
+            <a:pPr indent="0" marL="0">
+              <a:buNone/>
+            </a:pPr>
+            <a:r>
+              <a:rPr lang="en-US" sz="1800" dirty="0">
+                <a:solidFill>
+                  <a:schemeClr val="tx1"/>
+                </a:solidFill>
+              </a:rPr>
+              <a:t>Nos vemos en la sesión práctica del sábado 21 de noviembre.</a:t>
+            </a:r>
+            <a:endParaRPr lang="en-US" sz="1800" dirty="0"/>
+          </a:p>
+        </p:txBody>
+      </p:sp>
+      <p:sp>
+        <p:nvSpPr>
+          <p:cNvPr id="5" name="caja-lecturas"/>
+          <p:cNvSpPr/>
+          <p:nvPr/>
+        </p:nvSpPr>
+        <p:spPr>
+          <a:xfrm>
+            <a:off x="914400" y="3154680"/>
+            <a:ext cx="10424160" cy="2103120"/>
           </a:xfrm>
           <a:prstGeom prst="roundRect">
             <a:avLst>
-              <a:gd name="adj" fmla="val 5128"/>
+              <a:gd name="adj" fmla="val 4348"/>
             </a:avLst>
           </a:prstGeom>
           <a:solidFill>
@@ -4724,13 +4984,13 @@
       </p:sp>
       <p:sp>
         <p:nvSpPr>
-          <p:cNvPr id="7" name="Text 4"/>
+          <p:cNvPr id="6" name="Text 4"/>
           <p:cNvSpPr txBox="1"/>
           <p:nvPr/>
         </p:nvSpPr>
         <p:spPr>
           <a:xfrm>
-            <a:off x="1188720" y="4370832"/>
+            <a:off x="1188720" y="3319272"/>
             <a:ext cx="9875520" cy="365760"/>
           </a:xfrm>
           <a:prstGeom prst="rect">
@@ -4760,14 +5020,14 @@
       </p:sp>
       <p:sp>
         <p:nvSpPr>
-          <p:cNvPr id="8" name="Text 5"/>
+          <p:cNvPr id="7" name="Text 5"/>
           <p:cNvSpPr txBox="1"/>
           <p:nvPr/>
         </p:nvSpPr>
         <p:spPr>
           <a:xfrm>
-            <a:off x="1188720" y="4754880"/>
-            <a:ext cx="9875520" cy="1143000"/>
+            <a:off x="1188720" y="3703320"/>
+            <a:ext cx="9875520" cy="1463040"/>
           </a:xfrm>
           <a:prstGeom prst="rect">
             <a:avLst/>
@@ -4781,54 +5041,75 @@
           <a:p>
             <a:pPr marL="342900" indent="-342900">
               <a:spcAft>
-                <a:spcPts val="400"/>
+                <a:spcPts val="500"/>
               </a:spcAft>
               <a:buSzPct val="100000"/>
               <a:buChar char="•"/>
             </a:pPr>
             <a:r>
-              <a:rPr lang="en-US" sz="1300" dirty="0">
-                <a:solidFill>
-                  <a:schemeClr val="tx1"/>
-                </a:solidFill>
-              </a:rPr>
-              <a:t>Lawson, van Dorp y Falush. A tutorial on how not to over-interpret STRUCTURE and ADMIXTURE bar plots. Nat Commun 2018;9:3258 (principal)</a:t>
+              <a:rPr lang="en-US" sz="1300" u="sng" dirty="0">
+                <a:solidFill>
+                  <a:schemeClr val="accent1"/>
+                </a:solidFill>
+                <a:hlinkClick r:id="rId1" invalidUrl="" action="" tgtFrame="" tooltip="Lawson DJ, van Dorp L, Falush D. A tutorial on how not to over-interpret STRUCTURE and ADMIXTURE bar plots. Nat Commun. 2018;9:3258.  (principal)" history="1" highlightClick="0" endSnd="0">
+                  <a:extLst>
+                    <a:ext uri="{A12FA001-AC4F-418D-AE19-62706E023703}">
+                      <ahyp:hlinkClr xmlns:ahyp="http://schemas.microsoft.com/office/drawing/2018/hyperlinkcolor" val="tx"/>
+                    </a:ext>
+                  </a:extLst>
+                </a:hlinkClick>
+              </a:rPr>
+              <a:t>Lawson DJ, van Dorp L, Falush D. A tutorial on how not to over-interpret STRUCTURE and ADMIXTURE bar plots. Nat Commun. 2018;9:3258.  (principal)</a:t>
             </a:r>
             <a:endParaRPr lang="en-US" sz="1300" dirty="0"/>
           </a:p>
           <a:p>
             <a:pPr marL="342900" indent="-342900">
               <a:spcAft>
-                <a:spcPts val="400"/>
+                <a:spcPts val="500"/>
               </a:spcAft>
               <a:buSzPct val="100000"/>
               <a:buChar char="•"/>
             </a:pPr>
             <a:r>
-              <a:rPr lang="en-US" sz="1300" dirty="0">
-                <a:solidFill>
-                  <a:schemeClr val="tx1"/>
-                </a:solidFill>
-              </a:rPr>
-              <a:t>Patterson, Price y Reich. Population structure and eigenanalysis. PLoS Genet 2006;2(12):e190</a:t>
+              <a:rPr lang="en-US" sz="1300" u="sng" dirty="0">
+                <a:solidFill>
+                  <a:schemeClr val="accent1"/>
+                </a:solidFill>
+                <a:hlinkClick r:id="rId2" invalidUrl="" action="" tgtFrame="" tooltip="Patterson N, Price AL, Reich D. Population structure and eigenanalysis. PLoS Genet. 2006;2(12):e190." history="1" highlightClick="0" endSnd="0">
+                  <a:extLst>
+                    <a:ext uri="{A12FA001-AC4F-418D-AE19-62706E023703}">
+                      <ahyp:hlinkClr xmlns:ahyp="http://schemas.microsoft.com/office/drawing/2018/hyperlinkcolor" val="tx"/>
+                    </a:ext>
+                  </a:extLst>
+                </a:hlinkClick>
+              </a:rPr>
+              <a:t>Patterson N, Price AL, Reich D. Population structure and eigenanalysis. PLoS Genet. 2006;2(12):e190.</a:t>
             </a:r>
             <a:endParaRPr lang="en-US" sz="1300" dirty="0"/>
           </a:p>
           <a:p>
             <a:pPr marL="342900" indent="-342900">
               <a:spcAft>
-                <a:spcPts val="400"/>
+                <a:spcPts val="500"/>
               </a:spcAft>
               <a:buSzPct val="100000"/>
               <a:buChar char="•"/>
             </a:pPr>
             <a:r>
-              <a:rPr lang="en-US" sz="1300" dirty="0">
-                <a:solidFill>
-                  <a:schemeClr val="tx1"/>
-                </a:solidFill>
-              </a:rPr>
-              <a:t>McVean. A genealogical interpretation of principal components analysis. PLoS Genet 2009;5(10):e1000686</a:t>
+              <a:rPr lang="en-US" sz="1300" u="sng" dirty="0">
+                <a:solidFill>
+                  <a:schemeClr val="accent1"/>
+                </a:solidFill>
+                <a:hlinkClick r:id="rId3" invalidUrl="" action="" tgtFrame="" tooltip="McVean G. A genealogical interpretation of principal components analysis. PLoS Genet. 2009;5(10):e1000686." history="1" highlightClick="0" endSnd="0">
+                  <a:extLst>
+                    <a:ext uri="{A12FA001-AC4F-418D-AE19-62706E023703}">
+                      <ahyp:hlinkClr xmlns:ahyp="http://schemas.microsoft.com/office/drawing/2018/hyperlinkcolor" val="tx"/>
+                    </a:ext>
+                  </a:extLst>
+                </a:hlinkClick>
+              </a:rPr>
+              <a:t>McVean G. A genealogical interpretation of principal components analysis. PLoS Genet. 2009;5(10):e1000686.</a:t>
             </a:r>
             <a:endParaRPr lang="en-US" sz="1300" dirty="0"/>
           </a:p>
@@ -4836,16 +5117,14 @@
       </p:sp>
       <p:sp>
         <p:nvSpPr>
-          <p:cNvPr id="10" name="Text 0"/>
-          <p:cNvSpPr/>
-          <p:nvPr>
-            <p:ph idx="101" type="body" hasCustomPrompt="1"/>
-          </p:nvPr>
-        </p:nvSpPr>
-        <p:spPr>
-          <a:xfrm>
-            <a:off x="914400" y="1508760"/>
-            <a:ext cx="10424160" cy="4572000"/>
+          <p:cNvPr id="8" name="Text 6"/>
+          <p:cNvSpPr txBox="1"/>
+          <p:nvPr/>
+        </p:nvSpPr>
+        <p:spPr>
+          <a:xfrm>
+            <a:off x="914400" y="5943600"/>
+            <a:ext cx="8503920" cy="457200"/>
           </a:xfrm>
           <a:prstGeom prst="rect">
             <a:avLst/>
@@ -4854,6 +5133,98 @@
           <a:ln/>
         </p:spPr>
         <p:txBody>
+          <a:bodyPr wrap="square" lIns="0" tIns="0" rIns="0" bIns="0" rtlCol="0" anchor="ctr"/>
+          <a:lstStyle/>
+          <a:p>
+            <a:pPr indent="0" marL="0">
+              <a:buNone/>
+            </a:pPr>
+            <a:r>
+              <a:rPr lang="en-US" sz="1200" dirty="0">
+                <a:solidFill>
+                  <a:srgbClr val="6E7899"/>
+                </a:solidFill>
+              </a:rPr>
+              <a:t>Curso de ancestría genética · Dra. Yina Tatiana Zambrano · Asociación Colombiana de Genética Humana</a:t>
+            </a:r>
+            <a:endParaRPr lang="en-US" sz="1200" dirty="0"/>
+          </a:p>
+        </p:txBody>
+      </p:sp>
+      <p:pic>
+        <p:nvPicPr>
+          <p:cNvPr id="9" name="logo-acgh" descr="/tmp/claude-0/-home-claude/e238050a-ce3c-58bd-bb86-9554df59862c/scratchpad/marca/logo_acgh_hd.png">    </p:cNvPr>
+          <p:cNvPicPr>
+            <a:picLocks noChangeAspect="1"/>
+          </p:cNvPicPr>
+          <p:nvPr/>
+        </p:nvPicPr>
+        <p:blipFill>
+          <a:blip r:embed="rId4"/>
+          <a:stretch>
+            <a:fillRect/>
+          </a:stretch>
+        </p:blipFill>
+        <p:spPr>
+          <a:xfrm>
+            <a:off x="9464040" y="457200"/>
+            <a:ext cx="2002536" cy="749808"/>
+          </a:xfrm>
+          <a:prstGeom prst="rect">
+            <a:avLst/>
+          </a:prstGeom>
+        </p:spPr>
+      </p:pic>
+      <p:sp>
+        <p:nvSpPr>
+          <p:cNvPr id="11" name="Text 0"/>
+          <p:cNvSpPr/>
+          <p:nvPr>
+            <p:ph idx="100" type="title" hasCustomPrompt="1"/>
+          </p:nvPr>
+        </p:nvSpPr>
+        <p:spPr>
+          <a:xfrm>
+            <a:off x="914400" y="2286000"/>
+            <a:ext cx="9509760" cy="1828800"/>
+          </a:xfrm>
+          <a:prstGeom prst="rect">
+            <a:avLst/>
+          </a:prstGeom>
+          <a:noFill/>
+          <a:ln/>
+        </p:spPr>
+        <p:txBody>
+          <a:bodyPr wrap="square" rtlCol="0" anchor="b"/>
+          <a:lstStyle/>
+          <a:p>
+            <a:pPr algn="l" indent="0" marL="0">
+              <a:buNone/>
+            </a:pPr>
+            <a:endParaRPr lang="en-US" sz="3800" dirty="0"/>
+          </a:p>
+        </p:txBody>
+      </p:sp>
+      <p:sp>
+        <p:nvSpPr>
+          <p:cNvPr id="12" name="Text 0"/>
+          <p:cNvSpPr/>
+          <p:nvPr>
+            <p:ph idx="101" type="body" hasCustomPrompt="1"/>
+          </p:nvPr>
+        </p:nvSpPr>
+        <p:spPr>
+          <a:xfrm>
+            <a:off x="914400" y="4251960"/>
+            <a:ext cx="9509760" cy="1371600"/>
+          </a:xfrm>
+          <a:prstGeom prst="rect">
+            <a:avLst/>
+          </a:prstGeom>
+          <a:noFill/>
+          <a:ln/>
+        </p:spPr>
+        <p:txBody>
           <a:bodyPr wrap="square" rtlCol="0" anchor="t"/>
           <a:lstStyle/>
           <a:p>
@@ -4861,51 +5232,6 @@
               <a:buNone/>
             </a:pPr>
             <a:endParaRPr lang="en-US" sz="1700" dirty="0"/>
-          </a:p>
-        </p:txBody>
-      </p:sp>
-      <p:sp>
-        <p:nvSpPr>
-          <p:cNvPr id="25" name="Slide Number Placeholder 0"/>
-          <p:cNvSpPr>
-            <a:spLocks noGrp="1"/>
-          </p:cNvSpPr>
-          <p:nvPr>
-            <p:ph type="sldNum" sz="quarter" idx="4294967295"/>
-          </p:nvPr>
-        </p:nvSpPr>
-        <p:spPr>
-          <a:xfrm>
-            <a:off x="11475720" y="256032"/>
-            <a:ext cx="800000" cy="300000"/>
-          </a:xfrm>
-          <a:prstGeom prst="rect">
-            <a:avLst/>
-          </a:prstGeom>
-          <a:extLst>
-            <a:ext uri="{C572A759-6A51-4108-AA02-DFA0A04FC94B}">
-              <ma14:wrappingTextBoxFlag xmlns:ma14="http://schemas.microsoft.com/office/mac/drawingml/2011/main" val="0"/>
-            </a:ext>
-          </a:extLst>
-        </p:spPr>
-        <p:txBody>
-          <a:bodyPr/>
-          <a:lstStyle>
-            <a:lvl1pPr>
-              <a:defRPr sz="1100">
-                <a:solidFill>
-                  <a:srgbClr val="B9C0D8"/>
-                </a:solidFill>
-              </a:defRPr>
-            </a:lvl1pPr>
-          </a:lstStyle>
-          <a:p>
-            <a:pPr algn="l"/>
-            <a:fld id="{F7021451-1387-4CA6-816F-3879F97B5CBC}" type="slidenum">
-              <a:rPr b="0" lang="en-US"/>
-              <a:t>8</a:t>
-            </a:fld>
-            <a:endParaRPr lang="en-US"/>
           </a:p>
         </p:txBody>
       </p:sp>
@@ -4925,13 +5251,13 @@
         <a:srgbClr val="1F2A5A"/>
       </a:dk1>
       <a:lt1>
-        <a:srgbClr val="FFFAF0"/>
+        <a:srgbClr val="FFFFFF"/>
       </a:lt1>
       <a:dk2>
         <a:srgbClr val="354AC0"/>
       </a:dk2>
       <a:lt2>
-        <a:srgbClr val="FFF2DC"/>
+        <a:srgbClr val="FFF4E2"/>
       </a:lt2>
       <a:accent1>
         <a:srgbClr val="354AC0"/>
